--- a/submission/Early_Stage_Presentation_DataExodus.pptx
+++ b/submission/Early_Stage_Presentation_DataExodus.pptx
@@ -516,29 +516,31 @@
               <a:t>[0:00-0:15]</a:t>
             </a:r>
           </a:p>
-          <a:p>
-            <a:r>
-              <a:t>Good morning. My project is called DataExodus, and it answers one question:</a:t>
-            </a:r>
-          </a:p>
-          <a:p>
-            <a:r>
-              <a:t>when you open an ordinary Australian website, where does your data actually go?</a:t>
-            </a:r>
-          </a:p>
-          <a:p>
-            <a:r>
-              <a:t>Over the next ten minutes I'll cover the problem, what I'm building, how I'm</a:t>
-            </a:r>
-          </a:p>
-          <a:p>
-            <a:r>
-              <a:t>building it, and what is already working.</a:t>
-            </a:r>
-          </a:p>
-          <a:p>
-            <a:r>
-              <a:t>Do not read the slide. Say the question, then pause.</a:t>
+          <a:p/>
+          <a:p>
+            <a:r>
+              <a:t>Good morning. My name is Thanh Dat Phan.</a:t>
+            </a:r>
+          </a:p>
+          <a:p>
+            <a:r>
+              <a:t>My project is called DataExodus.</a:t>
+            </a:r>
+          </a:p>
+          <a:p>
+            <a:r>
+              <a:t>It answers one question.</a:t>
+            </a:r>
+          </a:p>
+          <a:p>
+            <a:r>
+              <a:t>When you open a normal website - where does your data go?</a:t>
+            </a:r>
+          </a:p>
+          <a:p/>
+          <a:p>
+            <a:r>
+              <a:t>[Delivery] Ask the question, then stop. Look at the audience, not the screen.</a:t>
             </a:r>
           </a:p>
         </p:txBody>
@@ -611,58 +613,76 @@
               <a:t>[8:25-9:25]</a:t>
             </a:r>
           </a:p>
-          <a:p>
-            <a:r>
-              <a:t>This is the slide I'd most like you to take away, because none of it is a plan -</a:t>
-            </a:r>
-          </a:p>
-          <a:p>
-            <a:r>
-              <a:t>it's all been run.</a:t>
-            </a:r>
-          </a:p>
           <a:p/>
           <a:p>
             <a:r>
-              <a:t>The MD5 I wrote is verified against twelve reference vectors, including the padding</a:t>
-            </a:r>
-          </a:p>
-          <a:p>
-            <a:r>
-              <a:t>boundaries at 55, 56 and 57 bytes, which is where hand-written MD5 usually breaks.</a:t>
+              <a:t>This is the most important slide.</a:t>
+            </a:r>
+          </a:p>
+          <a:p>
+            <a:r>
+              <a:t>None of this is a plan. I have run all of it.</a:t>
+            </a:r>
+          </a:p>
+          <a:p>
+            <a:r>
+              <a:t>My MD5 code is tested against twelve known answers.</a:t>
+            </a:r>
+          </a:p>
+          <a:p>
+            <a:r>
+              <a:t>That includes the sizes where hand-written MD5 usually breaks.</a:t>
+            </a:r>
+          </a:p>
+          <a:p>
+            <a:r>
+              <a:t>Now the best example.</a:t>
+            </a:r>
+          </a:p>
+          <a:p>
+            <a:r>
+              <a:t>You type your phone number with spaces.</a:t>
+            </a:r>
+          </a:p>
+          <a:p>
+            <a:r>
+              <a:t>The tracker removes the spaces and adds the country code.</a:t>
+            </a:r>
+          </a:p>
+          <a:p>
+            <a:r>
+              <a:t>Then it hashes that.</a:t>
+            </a:r>
+          </a:p>
+          <a:p>
+            <a:r>
+              <a:t>My old code matched nothing. It reported no leak. Silently.</a:t>
+            </a:r>
+          </a:p>
+          <a:p>
+            <a:r>
+              <a:t>My new code hashes every form.</a:t>
+            </a:r>
+          </a:p>
+          <a:p>
+            <a:r>
+              <a:t>I have a test that proves the old one missed, and the new one matches.</a:t>
+            </a:r>
+          </a:p>
+          <a:p>
+            <a:r>
+              <a:t>And zero false positives on blocking.</a:t>
+            </a:r>
+          </a:p>
+          <a:p>
+            <a:r>
+              <a:t>That is goal four, already met.</a:t>
             </a:r>
           </a:p>
           <a:p/>
           <a:p>
             <a:r>
-              <a:t>The normalisation line is my favourite. If you type your phone number as "0412 345</a:t>
-            </a:r>
-          </a:p>
-          <a:p>
-            <a:r>
-              <a:t>678" and a tracker hashes "61412345678", the old version of my code matched nothing</a:t>
-            </a:r>
-          </a:p>
-          <a:p>
-            <a:r>
-              <a:t>and reported no leak - silently. The fix hashes every plausible form. I have a test</a:t>
-            </a:r>
-          </a:p>
-          <a:p>
-            <a:r>
-              <a:t>that proves the old one missed and the new one matches.</a:t>
-            </a:r>
-          </a:p>
-          <a:p/>
-          <a:p>
-            <a:r>
-              <a:t>And zero false positives on the DNS blocking, which is the G4 number.</a:t>
-            </a:r>
-          </a:p>
-          <a:p/>
-          <a:p>
-            <a:r>
-              <a:t>Say "none of this is a plan, it's all been run" and then pause.</a:t>
+              <a:t>[Delivery] Pause after 'I have run all of it'. This slide answers 'is this student actually doing the work'.</a:t>
             </a:r>
           </a:p>
         </p:txBody>
@@ -735,41 +755,61 @@
               <a:t>[9:25-9:55]</a:t>
             </a:r>
           </a:p>
-          <a:p>
-            <a:r>
-              <a:t>Briefly: weeks 9 and 10 are the full crawl, 11 is deployment and the false-positive</a:t>
-            </a:r>
-          </a:p>
-          <a:p>
-            <a:r>
-              <a:t>testing, 12 and 13 are the dashboard and the analysis, 14 is the final presentation.</a:t>
-            </a:r>
-          </a:p>
           <a:p/>
           <a:p>
             <a:r>
-              <a:t>On risk - the honest one is the third. If someone turns on Chrome's secure DNS,</a:t>
-            </a:r>
-          </a:p>
-          <a:p>
-            <a:r>
-              <a:t>their queries go straight to Google and my sinkhole never sees them. I can't stop</a:t>
-            </a:r>
-          </a:p>
-          <a:p>
-            <a:r>
-              <a:t>that. But the extension still observes those requests, which is precisely why the</a:t>
-            </a:r>
-          </a:p>
-          <a:p>
-            <a:r>
-              <a:t>project is two deliverables and not one.</a:t>
+              <a:t>Week nine and ten: the full crawl of fifty sites.</a:t>
+            </a:r>
+          </a:p>
+          <a:p>
+            <a:r>
+              <a:t>Week eleven: deployment and false positive testing.</a:t>
+            </a:r>
+          </a:p>
+          <a:p>
+            <a:r>
+              <a:t>Week twelve and thirteen: dashboard and analysis.</a:t>
+            </a:r>
+          </a:p>
+          <a:p>
+            <a:r>
+              <a:t>Week fourteen: the final presentation.</a:t>
+            </a:r>
+          </a:p>
+          <a:p>
+            <a:r>
+              <a:t>Now one honest risk. The third one.</a:t>
+            </a:r>
+          </a:p>
+          <a:p>
+            <a:r>
+              <a:t>Chrome has a setting called secure DNS.</a:t>
+            </a:r>
+          </a:p>
+          <a:p>
+            <a:r>
+              <a:t>If someone turns it on, my Pi never sees their questions.</a:t>
+            </a:r>
+          </a:p>
+          <a:p>
+            <a:r>
+              <a:t>I cannot stop that.</a:t>
+            </a:r>
+          </a:p>
+          <a:p>
+            <a:r>
+              <a:t>But the extension still sees those requests.</a:t>
+            </a:r>
+          </a:p>
+          <a:p>
+            <a:r>
+              <a:t>That is exactly why this project has two parts, not one.</a:t>
             </a:r>
           </a:p>
           <a:p/>
           <a:p>
             <a:r>
-              <a:t>Don't rush this slide just because it's near the end.</a:t>
+              <a:t>[Delivery] Do not rush because you are near the end. The risk slide shows you understand your own limits.</a:t>
             </a:r>
           </a:p>
         </p:txBody>
@@ -842,66 +882,82 @@
               <a:t>[9:55-10:00]</a:t>
             </a:r>
           </a:p>
-          <a:p>
-            <a:r>
-              <a:t>To close: a hash is not anonymous, and this project proves it on your own traffic</a:t>
-            </a:r>
-          </a:p>
-          <a:p>
-            <a:r>
-              <a:t>rather than describing it. The extension shows you the problem; the Pi does</a:t>
-            </a:r>
-          </a:p>
-          <a:p>
-            <a:r>
-              <a:t>something about it for every device you own.</a:t>
-            </a:r>
-          </a:p>
           <a:p/>
           <a:p>
             <a:r>
-              <a:t>Happy to take questions.</a:t>
+              <a:t>So. A hash is not anonymous.</a:t>
+            </a:r>
+          </a:p>
+          <a:p>
+            <a:r>
+              <a:t>This project proves it on your own traffic. Then it blocks it.</a:t>
+            </a:r>
+          </a:p>
+          <a:p>
+            <a:r>
+              <a:t>Thank you. I am happy to take questions.</a:t>
             </a:r>
           </a:p>
           <a:p/>
           <a:p>
             <a:r>
-              <a:t>Likely questions and short answers:</a:t>
-            </a:r>
-          </a:p>
-          <a:p>
-            <a:r>
-              <a:t>- "Why not just use Pi-hole?" Pi-hole blocks. It doesn't tell you who owns a</a:t>
-            </a:r>
-          </a:p>
-          <a:p>
-            <a:r>
-              <a:t>  destination, which country it's in, or whether your identifier went with it.</a:t>
-            </a:r>
-          </a:p>
-          <a:p>
-            <a:r>
-              <a:t>- "Is this legal?" Public pages only, my own traffic, my own identifier, no logins</a:t>
-            </a:r>
-          </a:p>
-          <a:p>
-            <a:r>
-              <a:t>  and no attacks - the same basis as published academic measurement work.</a:t>
-            </a:r>
-          </a:p>
-          <a:p>
-            <a:r>
-              <a:t>- "Why only 50 sites?" Because I verify every classification by hand. Fifty is a</a:t>
-            </a:r>
-          </a:p>
-          <a:p>
-            <a:r>
-              <a:t>  number I can audit; five thousand is a number I could only assert.</a:t>
-            </a:r>
-          </a:p>
-          <a:p>
-            <a:r>
-              <a:t>- "What if you find nothing?" I report that. It's a measurement, not an argument.</a:t>
+              <a:t>[Delivery] Stand still. Do not fill the silence. Wait for the first question.</a:t>
+            </a:r>
+          </a:p>
+          <a:p/>
+          <a:p>
+            <a:r>
+              <a:t>[Likely questions]</a:t>
+            </a:r>
+          </a:p>
+          <a:p>
+            <a:r>
+              <a:t>Q: Why not just use Pi-hole?</a:t>
+            </a:r>
+          </a:p>
+          <a:p>
+            <a:r>
+              <a:t>A: Pi-hole blocks. It does not tell you who owns the destination, which country it is in, or whether your identifier went with it.</a:t>
+            </a:r>
+          </a:p>
+          <a:p>
+            <a:r>
+              <a:t>Q: Is this legal?</a:t>
+            </a:r>
+          </a:p>
+          <a:p>
+            <a:r>
+              <a:t>A: Public pages only. My own traffic. My own identifier. No logins, no attacks. The same basis as published academic studies.</a:t>
+            </a:r>
+          </a:p>
+          <a:p>
+            <a:r>
+              <a:t>Q: Why only fifty sites?</a:t>
+            </a:r>
+          </a:p>
+          <a:p>
+            <a:r>
+              <a:t>A: Because I check every classification by hand. Fifty is a number I can verify. Five thousand is a number I could only claim.</a:t>
+            </a:r>
+          </a:p>
+          <a:p>
+            <a:r>
+              <a:t>Q: What if you find nothing?</a:t>
+            </a:r>
+          </a:p>
+          <a:p>
+            <a:r>
+              <a:t>A: Then I report that. It is a measurement, not an argument.</a:t>
+            </a:r>
+          </a:p>
+          <a:p>
+            <a:r>
+              <a:t>Q: How do you know your blocking is safe?</a:t>
+            </a:r>
+          </a:p>
+          <a:p>
+            <a:r>
+              <a:t>A: I test it against a fixed list of twelve normal websites before deployment. Zero false positives is the pass condition, and I can roll the DNS setting back.</a:t>
             </a:r>
           </a:p>
         </p:txBody>
@@ -974,47 +1030,71 @@
               <a:t>[0:15-1:25]</a:t>
             </a:r>
           </a:p>
-          <a:p>
-            <a:r>
-              <a:t>This is the heart of the project. A tracker rarely sends your email address in</a:t>
-            </a:r>
-          </a:p>
-          <a:p>
-            <a:r>
-              <a:t>plain text - it sends the hash of it, and calls that anonymised.</a:t>
-            </a:r>
-          </a:p>
           <a:p/>
           <a:p>
             <a:r>
-              <a:t>But hashing is deterministic. The same email always produces the same hash. So</a:t>
-            </a:r>
-          </a:p>
-          <a:p>
-            <a:r>
-              <a:t>that value is still a name for you, it just isn't readable. Any site that</a:t>
-            </a:r>
-          </a:p>
-          <a:p>
-            <a:r>
-              <a:t>receives it recognises the same person.</a:t>
+              <a:t>Here is the problem.</a:t>
+            </a:r>
+          </a:p>
+          <a:p>
+            <a:r>
+              <a:t>A tracker does not send your email address.</a:t>
+            </a:r>
+          </a:p>
+          <a:p>
+            <a:r>
+              <a:t>It sends a hash of it. This number here.</a:t>
+            </a:r>
+          </a:p>
+          <a:p>
+            <a:r>
+              <a:t>And the company calls that anonymous.</a:t>
+            </a:r>
+          </a:p>
+          <a:p>
+            <a:r>
+              <a:t>It is not anonymous.</a:t>
+            </a:r>
+          </a:p>
+          <a:p>
+            <a:r>
+              <a:t>Here is why.</a:t>
+            </a:r>
+          </a:p>
+          <a:p>
+            <a:r>
+              <a:t>The same email always makes the same hash. Always.</a:t>
+            </a:r>
+          </a:p>
+          <a:p>
+            <a:r>
+              <a:t>So this number is still your name. You just cannot read it.</a:t>
+            </a:r>
+          </a:p>
+          <a:p>
+            <a:r>
+              <a:t>Every website that receives this number sees the same person.</a:t>
+            </a:r>
+          </a:p>
+          <a:p>
+            <a:r>
+              <a:t>The US Federal Trade Commission said this in 2024.</a:t>
+            </a:r>
+          </a:p>
+          <a:p>
+            <a:r>
+              <a:t>My project does not only explain this.</a:t>
+            </a:r>
+          </a:p>
+          <a:p>
+            <a:r>
+              <a:t>It proves it, on your own traffic.</a:t>
             </a:r>
           </a:p>
           <a:p/>
           <a:p>
             <a:r>
-              <a:t>The FTC said exactly this in 2024. My project doesn't argue the point - it</a:t>
-            </a:r>
-          </a:p>
-          <a:p>
-            <a:r>
-              <a:t>demonstrates it, on the audience's own traffic.</a:t>
-            </a:r>
-          </a:p>
-          <a:p/>
-          <a:p>
-            <a:r>
-              <a:t>Pause after "It is not." Let it land.</a:t>
+              <a:t>[Delivery] Say 'It is not anonymous' slowly, then pause two seconds. anonymous = uh-NON-uh-muss.</a:t>
             </a:r>
           </a:p>
         </p:txBody>
@@ -1087,41 +1167,56 @@
               <a:t>[1:25-2:25]</a:t>
             </a:r>
           </a:p>
-          <a:p>
-            <a:r>
-              <a:t>Why Australia specifically. Australian Privacy Principle 8 places obligations on</a:t>
-            </a:r>
-          </a:p>
-          <a:p>
-            <a:r>
-              <a:t>organisations that send personal information overseas. The ACCC's Digital</a:t>
-            </a:r>
-          </a:p>
-          <a:p>
-            <a:r>
-              <a:t>Platforms Inquiry found consumers have almost no practical visibility of this.</a:t>
-            </a:r>
-          </a:p>
           <a:p/>
           <a:p>
             <a:r>
-              <a:t>So there is a law about cross-border disclosure, and no way for an ordinary</a:t>
-            </a:r>
-          </a:p>
-          <a:p>
-            <a:r>
-              <a:t>person to see whether it is happening to them. That gap is what I'm building for.</a:t>
+              <a:t>Why does this matter here in Australia?</a:t>
+            </a:r>
+          </a:p>
+          <a:p>
+            <a:r>
+              <a:t>We have a law. The Privacy Act. Principle 8.</a:t>
+            </a:r>
+          </a:p>
+          <a:p>
+            <a:r>
+              <a:t>If a company sends your data overseas, it has duties.</a:t>
+            </a:r>
+          </a:p>
+          <a:p>
+            <a:r>
+              <a:t>The ACCC studied this problem.</a:t>
+            </a:r>
+          </a:p>
+          <a:p>
+            <a:r>
+              <a:t>They found that people cannot see who receives their data.</a:t>
+            </a:r>
+          </a:p>
+          <a:p>
+            <a:r>
+              <a:t>So we have a law about it.</a:t>
+            </a:r>
+          </a:p>
+          <a:p>
+            <a:r>
+              <a:t>But a normal person cannot check it.</a:t>
+            </a:r>
+          </a:p>
+          <a:p>
+            <a:r>
+              <a:t>That gap is what I am building for.</a:t>
+            </a:r>
+          </a:p>
+          <a:p>
+            <a:r>
+              <a:t>This is my own project. I have no client.</a:t>
             </a:r>
           </a:p>
           <a:p/>
           <a:p>
             <a:r>
-              <a:t>This is my own initiative - there's no external client. The assessor is the</a:t>
-            </a:r>
-          </a:p>
-          <a:p>
-            <a:r>
-              <a:t>approving stakeholder.</a:t>
+              <a:t>[Delivery] Slow down on 'Principle 8'. Let the contrast land: there is a law, but no way to check it.</a:t>
             </a:r>
           </a:p>
         </p:txBody>
@@ -1194,57 +1289,71 @@
               <a:t>[2:25-3:25]</a:t>
             </a:r>
           </a:p>
-          <a:p>
-            <a:r>
-              <a:t>The project is two things a person actually installs.</a:t>
-            </a:r>
-          </a:p>
           <a:p/>
           <a:p>
             <a:r>
-              <a:t>First, a Chrome extension. It watches every request the browser makes, names the</a:t>
-            </a:r>
-          </a:p>
-          <a:p>
-            <a:r>
-              <a:t>company behind each destination, scores the page for risk, and detects your own</a:t>
-            </a:r>
-          </a:p>
-          <a:p>
-            <a:r>
-              <a:t>identifier leaving as a hash.</a:t>
+              <a:t>I am building two things. You can install both.</a:t>
+            </a:r>
+          </a:p>
+          <a:p>
+            <a:r>
+              <a:t>First, a Chrome extension.</a:t>
+            </a:r>
+          </a:p>
+          <a:p>
+            <a:r>
+              <a:t>It watches every request your browser makes.</a:t>
+            </a:r>
+          </a:p>
+          <a:p>
+            <a:r>
+              <a:t>It names the company. It scores the risk.</a:t>
+            </a:r>
+          </a:p>
+          <a:p>
+            <a:r>
+              <a:t>And it watches for your identifier leaving.</a:t>
+            </a:r>
+          </a:p>
+          <a:p>
+            <a:r>
+              <a:t>Second, a Raspberry Pi application.</a:t>
+            </a:r>
+          </a:p>
+          <a:p>
+            <a:r>
+              <a:t>It adds the country. It keeps the history.</a:t>
+            </a:r>
+          </a:p>
+          <a:p>
+            <a:r>
+              <a:t>And it blocks trackers using DNS.</a:t>
+            </a:r>
+          </a:p>
+          <a:p>
+            <a:r>
+              <a:t>DNS covers every device. Your phone. Your television.</a:t>
+            </a:r>
+          </a:p>
+          <a:p>
+            <a:r>
+              <a:t>Those can never run an extension.</a:t>
+            </a:r>
+          </a:p>
+          <a:p>
+            <a:r>
+              <a:t>One sentence to remember.</a:t>
+            </a:r>
+          </a:p>
+          <a:p>
+            <a:r>
+              <a:t>The extension shows you the problem. The Pi does something about it.</a:t>
             </a:r>
           </a:p>
           <a:p/>
           <a:p>
             <a:r>
-              <a:t>Second, a Raspberry Pi application. It collects what the extension sees, adds</a:t>
-            </a:r>
-          </a:p>
-          <a:p>
-            <a:r>
-              <a:t>country attribution the browser can't do, and blocks tracker domains by DNS -</a:t>
-            </a:r>
-          </a:p>
-          <a:p>
-            <a:r>
-              <a:t>which covers every device on the network, including the phone and the TV that</a:t>
-            </a:r>
-          </a:p>
-          <a:p>
-            <a:r>
-              <a:t>can never run an extension.</a:t>
-            </a:r>
-          </a:p>
-          <a:p/>
-          <a:p>
-            <a:r>
-              <a:t>One line to remember: the extension shows you the problem, the Pi does something</a:t>
-            </a:r>
-          </a:p>
-          <a:p>
-            <a:r>
-              <a:t>about it.</a:t>
+              <a:t>[Delivery] Point left for the extension, right for the Pi. Say the last two sentences slowly - this is the line they remember.</a:t>
             </a:r>
           </a:p>
         </p:txBody>
@@ -1317,57 +1426,76 @@
               <a:t>[3:25-4:40]</a:t>
             </a:r>
           </a:p>
+          <a:p/>
           <a:p>
             <a:r>
               <a:t>This is the whole system on one slide.</a:t>
             </a:r>
           </a:p>
+          <a:p>
+            <a:r>
+              <a:t>On the left is your home.</a:t>
+            </a:r>
+          </a:p>
+          <a:p>
+            <a:r>
+              <a:t>The laptop runs the extension. The phone and the TV cannot.</a:t>
+            </a:r>
+          </a:p>
+          <a:p>
+            <a:r>
+              <a:t>In the middle is the Raspberry Pi.</a:t>
+            </a:r>
+          </a:p>
+          <a:p>
+            <a:r>
+              <a:t>At the top, the DNS sinkhole. It answers tracker questions with zero.</a:t>
+            </a:r>
+          </a:p>
+          <a:p>
+            <a:r>
+              <a:t>Below that, the app. It receives the data and stores it.</a:t>
+            </a:r>
+          </a:p>
+          <a:p>
+            <a:r>
+              <a:t>At the bottom, the dashboard.</a:t>
+            </a:r>
+          </a:p>
+          <a:p>
+            <a:r>
+              <a:t>Now look at the orange bar.</a:t>
+            </a:r>
+          </a:p>
+          <a:p>
+            <a:r>
+              <a:t>This is the privacy boundary.</a:t>
+            </a:r>
+          </a:p>
+          <a:p>
+            <a:r>
+              <a:t>Your real email never crosses it. Full web addresses never cross it.</a:t>
+            </a:r>
+          </a:p>
+          <a:p>
+            <a:r>
+              <a:t>Only hashes are compared. Only host names are sent.</a:t>
+            </a:r>
+          </a:p>
+          <a:p>
+            <a:r>
+              <a:t>A web address contains your search words.</a:t>
+            </a:r>
+          </a:p>
+          <a:p>
+            <a:r>
+              <a:t>This is a privacy tool. So I do not send it.</a:t>
+            </a:r>
+          </a:p>
           <a:p/>
           <a:p>
             <a:r>
-              <a:t>On the left, the home network. The laptop runs the extension; the phone and the</a:t>
-            </a:r>
-          </a:p>
-          <a:p>
-            <a:r>
-              <a:t>TV cannot. In the middle, the Raspberry Pi: the DNS sinkhole at the top answers</a:t>
-            </a:r>
-          </a:p>
-          <a:p>
-            <a:r>
-              <a:t>tracker queries with 0.0.0.0, the FastAPI app receives telemetry, classify and</a:t>
-            </a:r>
-          </a:p>
-          <a:p>
-            <a:r>
-              <a:t>store handle attribution and storage, and the dashboard presents it.</a:t>
-            </a:r>
-          </a:p>
-          <a:p/>
-          <a:p>
-            <a:r>
-              <a:t>Point at the orange bar along the bottom. That is the privacy boundary. The raw</a:t>
-            </a:r>
-          </a:p>
-          <a:p>
-            <a:r>
-              <a:t>email and the full page URLs never cross it. Only hashes are compared and only</a:t>
-            </a:r>
-          </a:p>
-          <a:p>
-            <a:r>
-              <a:t>hostnames are sent - because a URL carries your search terms and session ids, and</a:t>
-            </a:r>
-          </a:p>
-          <a:p>
-            <a:r>
-              <a:t>this is supposed to be a privacy tool.</a:t>
-            </a:r>
-          </a:p>
-          <a:p/>
-          <a:p>
-            <a:r>
-              <a:t>Walk the diagram left to right with your hand, then turn back to the audience.</a:t>
+              <a:t>[Delivery] Move your hand across the diagram, left to right. Then turn back and face the audience for the orange bar.</a:t>
             </a:r>
           </a:p>
         </p:txBody>
@@ -1440,52 +1568,71 @@
               <a:t>[4:40-5:40]</a:t>
             </a:r>
           </a:p>
-          <a:p>
-            <a:r>
-              <a:t>Seven high-level requirements on the left - what the system has to do. Seven</a:t>
-            </a:r>
-          </a:p>
-          <a:p>
-            <a:r>
-              <a:t>matching implementation decisions on the right - how.</a:t>
-            </a:r>
-          </a:p>
           <a:p/>
           <a:p>
             <a:r>
-              <a:t>I'll call out two. HR-4: distinguishing covert from intentional. If you type your</a:t>
-            </a:r>
-          </a:p>
-          <a:p>
-            <a:r>
-              <a:t>email into a site's own search box, that's you choosing to. If that site quietly</a:t>
-            </a:r>
-          </a:p>
-          <a:p>
-            <a:r>
-              <a:t>forwards the hash to Facebook, that's the thing worth alarming about. Early on I</a:t>
-            </a:r>
-          </a:p>
-          <a:p>
-            <a:r>
-              <a:t>treated both the same, and everything looked like a breach.</a:t>
+              <a:t>Seven requirements on the left. What the system must do.</a:t>
+            </a:r>
+          </a:p>
+          <a:p>
+            <a:r>
+              <a:t>Seven decisions on the right. How I do it.</a:t>
+            </a:r>
+          </a:p>
+          <a:p>
+            <a:r>
+              <a:t>I will explain two of them.</a:t>
+            </a:r>
+          </a:p>
+          <a:p>
+            <a:r>
+              <a:t>Number four. Hidden sharing, versus your own choice.</a:t>
+            </a:r>
+          </a:p>
+          <a:p>
+            <a:r>
+              <a:t>You type your email into a search box. That is your choice. That is fine.</a:t>
+            </a:r>
+          </a:p>
+          <a:p>
+            <a:r>
+              <a:t>The site sends your email hash to Facebook. That is not fine.</a:t>
+            </a:r>
+          </a:p>
+          <a:p>
+            <a:r>
+              <a:t>At first my code treated both the same.</a:t>
+            </a:r>
+          </a:p>
+          <a:p>
+            <a:r>
+              <a:t>Then everything looked like a leak.</a:t>
+            </a:r>
+          </a:p>
+          <a:p>
+            <a:r>
+              <a:t>Now, normalisation.</a:t>
+            </a:r>
+          </a:p>
+          <a:p>
+            <a:r>
+              <a:t>A tracker does not hash what you typed.</a:t>
+            </a:r>
+          </a:p>
+          <a:p>
+            <a:r>
+              <a:t>It cleans the value first, then hashes it.</a:t>
+            </a:r>
+          </a:p>
+          <a:p>
+            <a:r>
+              <a:t>I will show you why that matters.</a:t>
             </a:r>
           </a:p>
           <a:p/>
           <a:p>
             <a:r>
-              <a:t>And the normalisation row. A tracker doesn't hash what you typed - it hashes what</a:t>
-            </a:r>
-          </a:p>
-          <a:p>
-            <a:r>
-              <a:t>its own pipeline normalised first. I'll come back to that.</a:t>
-            </a:r>
-          </a:p>
-          <a:p/>
-          <a:p>
-            <a:r>
-              <a:t>In the plan each of these is traced through to how it gets verified.</a:t>
+              <a:t>[Delivery] normalisation = nor-muh-lie-ZAY-shun. End with 'I will show you why' - it sets up slide ten.</a:t>
             </a:r>
           </a:p>
         </p:txBody>
@@ -1558,42 +1705,56 @@
               <a:t>[5:40-6:25]</a:t>
             </a:r>
           </a:p>
-          <a:p>
-            <a:r>
-              <a:t>Six goals, each measurable and dated, and together they cover every requirement.</a:t>
-            </a:r>
-          </a:p>
           <a:p/>
           <a:p>
             <a:r>
-              <a:t>The one I'd point at is G4: zero false positives. Not "few". At the DNS layer a</a:t>
-            </a:r>
-          </a:p>
-          <a:p>
-            <a:r>
-              <a:t>false positive doesn't inconvenience one browser - it takes a website off the air</a:t>
-            </a:r>
-          </a:p>
-          <a:p>
-            <a:r>
-              <a:t>for everyone in the house. That's the number that has to be zero.</a:t>
+              <a:t>Six goals. Each one has a number and a date.</a:t>
+            </a:r>
+          </a:p>
+          <a:p>
+            <a:r>
+              <a:t>Together they cover every requirement.</a:t>
+            </a:r>
+          </a:p>
+          <a:p>
+            <a:r>
+              <a:t>Look at goal four. Zero false positives.</a:t>
+            </a:r>
+          </a:p>
+          <a:p>
+            <a:r>
+              <a:t>Not 'a few'. Zero.</a:t>
+            </a:r>
+          </a:p>
+          <a:p>
+            <a:r>
+              <a:t>Because at the DNS layer, a mistake is not small.</a:t>
+            </a:r>
+          </a:p>
+          <a:p>
+            <a:r>
+              <a:t>It removes a website for the whole house.</a:t>
+            </a:r>
+          </a:p>
+          <a:p>
+            <a:r>
+              <a:t>And goal six says 'significant or not'.</a:t>
+            </a:r>
+          </a:p>
+          <a:p>
+            <a:r>
+              <a:t>If I find nothing, I report nothing.</a:t>
+            </a:r>
+          </a:p>
+          <a:p>
+            <a:r>
+              <a:t>This is a measurement. It is not an argument.</a:t>
             </a:r>
           </a:p>
           <a:p/>
           <a:p>
             <a:r>
-              <a:t>G6 says "significant or not" deliberately. If sectors don't differ, I report that.</a:t>
-            </a:r>
-          </a:p>
-          <a:p>
-            <a:r>
-              <a:t>I'm not designing this to confirm an answer I already like.</a:t>
-            </a:r>
-          </a:p>
-          <a:p/>
-          <a:p>
-            <a:r>
-              <a:t>Don't read all six. Name the count, then talk about G4 and G6.</a:t>
+              <a:t>[Delivery] Do not read all six goals. Name the number, then talk about goal four and goal six only.</a:t>
             </a:r>
           </a:p>
         </p:txBody>
@@ -1666,74 +1827,91 @@
               <a:t>[6:25-7:40]</a:t>
             </a:r>
           </a:p>
-          <a:p>
-            <a:r>
-              <a:t>Methodology, and this is where I want to be concrete rather than quote a textbook.</a:t>
-            </a:r>
-          </a:p>
           <a:p/>
           <a:p>
             <a:r>
-              <a:t>I build in vertical layers. Each one is a complete working system by itself, and</a:t>
-            </a:r>
-          </a:p>
-          <a:p>
-            <a:r>
-              <a:t>later layers add capability without making earlier ones worthless.</a:t>
+              <a:t>I build in layers. Each layer works on its own.</a:t>
+            </a:r>
+          </a:p>
+          <a:p>
+            <a:r>
+              <a:t>Layer one, the extension. Layer two, the Pi.</a:t>
+            </a:r>
+          </a:p>
+          <a:p>
+            <a:r>
+              <a:t>Layer three, blocking. Layer four, the study.</a:t>
+            </a:r>
+          </a:p>
+          <a:p>
+            <a:r>
+              <a:t>Why not waterfall?</a:t>
+            </a:r>
+          </a:p>
+          <a:p>
+            <a:r>
+              <a:t>My hardest questions are technical, and they come early.</a:t>
+            </a:r>
+          </a:p>
+          <a:p>
+            <a:r>
+              <a:t>Waterfall would find them at the end. Too late to fix.</a:t>
+            </a:r>
+          </a:p>
+          <a:p>
+            <a:r>
+              <a:t>Why not Scrum?</a:t>
+            </a:r>
+          </a:p>
+          <a:p>
+            <a:r>
+              <a:t>Scrum meetings organise a team. I am one person.</a:t>
+            </a:r>
+          </a:p>
+          <a:p>
+            <a:r>
+              <a:t>I kept the short steps. I dropped the meetings.</a:t>
+            </a:r>
+          </a:p>
+          <a:p>
+            <a:r>
+              <a:t>And here is proof this was the right choice.</a:t>
+            </a:r>
+          </a:p>
+          <a:p>
+            <a:r>
+              <a:t>My blocking code marked Wikipedia as a tracker. GitHub too.</a:t>
+            </a:r>
+          </a:p>
+          <a:p>
+            <a:r>
+              <a:t>Why? A filter rule that blocks one page</a:t>
+            </a:r>
+          </a:p>
+          <a:p>
+            <a:r>
+              <a:t>was read as blocking the whole website.</a:t>
+            </a:r>
+          </a:p>
+          <a:p>
+            <a:r>
+              <a:t>At the DNS layer, that removes Wikipedia.</a:t>
+            </a:r>
+          </a:p>
+          <a:p>
+            <a:r>
+              <a:t>For every device in the house.</a:t>
+            </a:r>
+          </a:p>
+          <a:p>
+            <a:r>
+              <a:t>I found it because I tested that layer alone, before connecting it.</a:t>
             </a:r>
           </a:p>
           <a:p/>
           <a:p>
             <a:r>
-              <a:t>Why not waterfall: my riskiest unknowns are technical and they sit early. Waterfall</a:t>
-            </a:r>
-          </a:p>
-          <a:p>
-            <a:r>
-              <a:t>would surface them in an integration phase with no time left to react.</a:t>
-            </a:r>
-          </a:p>
-          <a:p/>
-          <a:p>
-            <a:r>
-              <a:t>Why not formal Scrum: the ceremonies exist to coordinate a team. There's one of me.</a:t>
-            </a:r>
-          </a:p>
-          <a:p>
-            <a:r>
-              <a:t>I kept short increments and working software; I dropped the meetings.</a:t>
-            </a:r>
-          </a:p>
-          <a:p/>
-          <a:p>
-            <a:r>
-              <a:t>And here's the evidence it was the right call. My DNS blocklist parser classified</a:t>
-            </a:r>
-          </a:p>
-          <a:p>
-            <a:r>
-              <a:t>wikipedia.org and github.com as trackers - because filter rules that block a single</a:t>
-            </a:r>
-          </a:p>
-          <a:p>
-            <a:r>
-              <a:t>path were being read as blocking the whole domain. At the DNS layer that takes</a:t>
-            </a:r>
-          </a:p>
-          <a:p>
-            <a:r>
-              <a:t>Wikipedia off the air for every device in the house. I caught it because I tested</a:t>
-            </a:r>
-          </a:p>
-          <a:p>
-            <a:r>
-              <a:t>that layer in isolation before connecting it to anything.</a:t>
-            </a:r>
-          </a:p>
-          <a:p/>
-          <a:p>
-            <a:r>
-              <a:t>This story is worth telling properly - it's the strongest thing on the slide.</a:t>
+              <a:t>[Delivery] This is your strongest story. Tell it fully. Pause before 'And here is proof'.</a:t>
             </a:r>
           </a:p>
         </p:txBody>
@@ -1806,47 +1984,61 @@
               <a:t>[7:40-8:25]</a:t>
             </a:r>
           </a:p>
-          <a:p>
-            <a:r>
-              <a:t>Quickly on tools, because the plan justifies each one in detail.</a:t>
-            </a:r>
-          </a:p>
           <a:p/>
           <a:p>
             <a:r>
-              <a:t>Two worth naming here. DuckDB, because my questions are aggregate ones - "which</a:t>
-            </a:r>
-          </a:p>
-          <a:p>
-            <a:r>
-              <a:t>company receives the most requests" - and that's what a columnar database is for,</a:t>
-            </a:r>
-          </a:p>
-          <a:p>
-            <a:r>
-              <a:t>in a single file with no server to administer.</a:t>
+              <a:t>Now the tools. Quickly - the plan explains each one.</a:t>
+            </a:r>
+          </a:p>
+          <a:p>
+            <a:r>
+              <a:t>I want to name two.</a:t>
+            </a:r>
+          </a:p>
+          <a:p>
+            <a:r>
+              <a:t>DuckDB. My questions are like this:</a:t>
+            </a:r>
+          </a:p>
+          <a:p>
+            <a:r>
+              <a:t>which company receives the most requests?</a:t>
+            </a:r>
+          </a:p>
+          <a:p>
+            <a:r>
+              <a:t>That is what this database is built for. One file. No server.</a:t>
+            </a:r>
+          </a:p>
+          <a:p>
+            <a:r>
+              <a:t>And dnslib, instead of a configuration file.</a:t>
+            </a:r>
+          </a:p>
+          <a:p>
+            <a:r>
+              <a:t>I want my blocking logic to be code I can read and test.</a:t>
+            </a:r>
+          </a:p>
+          <a:p>
+            <a:r>
+              <a:t>On standards: every list I use is public.</a:t>
+            </a:r>
+          </a:p>
+          <a:p>
+            <a:r>
+              <a:t>So you can check any claim I make.</a:t>
+            </a:r>
+          </a:p>
+          <a:p>
+            <a:r>
+              <a:t>That is on purpose.</a:t>
             </a:r>
           </a:p>
           <a:p/>
           <a:p>
             <a:r>
-              <a:t>And dnslib rather than configuring dnsmasq, because I want the blocking logic to be</a:t>
-            </a:r>
-          </a:p>
-          <a:p>
-            <a:r>
-              <a:t>code I can read and test, not settings buried in a config file.</a:t>
-            </a:r>
-          </a:p>
-          <a:p/>
-          <a:p>
-            <a:r>
-              <a:t>On standards: everything I classify comes from a public list. That means a marker</a:t>
-            </a:r>
-          </a:p>
-          <a:p>
-            <a:r>
-              <a:t>can check any claim I make. That's deliberate.</a:t>
+              <a:t>[Delivery] Keep this slide fast. It is supporting detail, not the main point.</a:t>
             </a:r>
           </a:p>
         </p:txBody>
